--- a/dist/초2/수학/도형과측정/초2_수학_도형과측정_04_m와cm_학생용.pptx
+++ b/dist/초2/수학/도형과측정/초2_수학_도형과측정_04_m와cm_학생용.pptx
@@ -121,13 +121,13 @@
   <p:extLst>
     <p:ext uri="{521415D9-36F7-43E2-AB2F-B90AF26B5E84}">
       <p14:sectionLst xmlns:p14="http://schemas.microsoft.com/office/powerpoint/2010/main">
-        <p14:section name="도입" id="{dcfdde25-3edc-2e1c-feba-879680eaafc1}">
+        <p14:section name="도입" id="{71aa1bdf-9108-00bc-15ab-8a17e2da98d8}">
           <p14:sldIdLst>
             <p14:sldId id="256"/>
             <p14:sldId id="257"/>
           </p14:sldIdLst>
         </p14:section>
-        <p14:section name="개념" id="{ee14036e-3fca-e790-b728-d71bb3f9fe03}">
+        <p14:section name="개념" id="{e2ee7ad4-07af-21b7-d859-9096114a8398}">
           <p14:sldIdLst>
             <p14:sldId id="258"/>
             <p14:sldId id="259"/>
@@ -136,7 +136,7 @@
             <p14:sldId id="264"/>
           </p14:sldIdLst>
         </p14:section>
-        <p14:section name="연습" id="{d9d32ff0-eafc-2d95-40f9-39a0eb98145f}">
+        <p14:section name="연습" id="{84653748-442c-0f97-cb95-7e99f36c7498}">
           <p14:sldIdLst>
             <p14:sldId id="261"/>
             <p14:sldId id="262"/>
@@ -144,24 +144,24 @@
             <p14:sldId id="266"/>
           </p14:sldIdLst>
         </p14:section>
-        <p14:section name="개념" id="{0951ac92-207b-f4f1-61f3-e413380eefee}">
+        <p14:section name="개념" id="{78e3e58c-7bbf-97b4-9065-2b0493ba21c2}">
           <p14:sldIdLst/>
         </p14:section>
-        <p14:section name="연습" id="{e0262a25-0963-84a1-f7fb-84454f03d047}">
+        <p14:section name="연습" id="{e57f8569-d619-00ee-f07b-0dcb25f40320}">
           <p14:sldIdLst/>
         </p14:section>
-        <p14:section name="확인" id="{bb0c1b97-20c4-a35d-6c9a-ab6478df8abe}">
+        <p14:section name="확인" id="{02233047-29d4-421d-c788-d46fe6fb2cb9}">
           <p14:sldIdLst>
             <p14:sldId id="267"/>
             <p14:sldId id="268"/>
           </p14:sldIdLst>
         </p14:section>
-        <p14:section name="정리" id="{44a62f01-5dbe-5daa-612f-b6d1f74398aa}">
+        <p14:section name="정리" id="{fce1932d-81e0-b658-c35b-b4d6c7c52457}">
           <p14:sldIdLst>
             <p14:sldId id="269"/>
           </p14:sldIdLst>
         </p14:section>
-        <p14:section name="보충" id="{f47dd88f-7419-a057-955c-31ac842a1fbd}">
+        <p14:section name="보충" id="{90ecb037-e52c-110d-f3d2-cdd7f2dd83a2}">
           <p14:sldIdLst>
             <p14:sldId id="270"/>
           </p14:sldIdLst>
@@ -7598,7 +7598,7 @@
         </p:nvSpPr>
         <p:spPr>
           <a:xfrm>
-            <a:off x="548640" y="1773936"/>
+            <a:off x="548640" y="2219706"/>
             <a:ext cx="566928" cy="566928"/>
           </a:xfrm>
           <a:prstGeom prst="roundRect">
@@ -7645,8 +7645,8 @@
         </p:nvSpPr>
         <p:spPr>
           <a:xfrm>
-            <a:off x="1481328" y="2159000"/>
-            <a:ext cx="3931920" cy="0"/>
+            <a:off x="1481328" y="2785720"/>
+            <a:ext cx="4293108" cy="0"/>
           </a:xfrm>
           <a:prstGeom prst="line">
             <a:avLst/>
@@ -7670,7 +7670,7 @@
         </p:nvSpPr>
         <p:spPr>
           <a:xfrm>
-            <a:off x="1755648" y="2012696"/>
+            <a:off x="1755648" y="2639416"/>
             <a:ext cx="0" cy="292608"/>
           </a:xfrm>
           <a:prstGeom prst="line">
@@ -7693,7 +7693,7 @@
         </p:nvSpPr>
         <p:spPr>
           <a:xfrm>
-            <a:off x="1298448" y="2341880"/>
+            <a:off x="1298448" y="2968600"/>
             <a:ext cx="914400" cy="264160"/>
           </a:xfrm>
           <a:prstGeom prst="rect">
@@ -7732,7 +7732,7 @@
         </p:nvSpPr>
         <p:spPr>
           <a:xfrm>
-            <a:off x="2093976" y="2012696"/>
+            <a:off x="2130095" y="2639416"/>
             <a:ext cx="0" cy="292608"/>
           </a:xfrm>
           <a:prstGeom prst="line">
@@ -7755,7 +7755,7 @@
         </p:nvSpPr>
         <p:spPr>
           <a:xfrm>
-            <a:off x="1636776" y="2341880"/>
+            <a:off x="1672895" y="2968600"/>
             <a:ext cx="914400" cy="264160"/>
           </a:xfrm>
           <a:prstGeom prst="rect">
@@ -7794,7 +7794,7 @@
         </p:nvSpPr>
         <p:spPr>
           <a:xfrm>
-            <a:off x="2432304" y="2012696"/>
+            <a:off x="2504542" y="2639416"/>
             <a:ext cx="0" cy="292608"/>
           </a:xfrm>
           <a:prstGeom prst="line">
@@ -7817,7 +7817,7 @@
         </p:nvSpPr>
         <p:spPr>
           <a:xfrm>
-            <a:off x="1975104" y="2341880"/>
+            <a:off x="2047342" y="2968600"/>
             <a:ext cx="914400" cy="264160"/>
           </a:xfrm>
           <a:prstGeom prst="rect">
@@ -7856,7 +7856,7 @@
         </p:nvSpPr>
         <p:spPr>
           <a:xfrm>
-            <a:off x="2770632" y="2012696"/>
+            <a:off x="2878988" y="2639416"/>
             <a:ext cx="0" cy="292608"/>
           </a:xfrm>
           <a:prstGeom prst="line">
@@ -7879,7 +7879,7 @@
         </p:nvSpPr>
         <p:spPr>
           <a:xfrm>
-            <a:off x="2313432" y="2341880"/>
+            <a:off x="2421788" y="2968600"/>
             <a:ext cx="914400" cy="264160"/>
           </a:xfrm>
           <a:prstGeom prst="rect">
@@ -7918,7 +7918,7 @@
         </p:nvSpPr>
         <p:spPr>
           <a:xfrm>
-            <a:off x="3108960" y="2012696"/>
+            <a:off x="3253435" y="2639416"/>
             <a:ext cx="0" cy="292608"/>
           </a:xfrm>
           <a:prstGeom prst="line">
@@ -7941,7 +7941,7 @@
         </p:nvSpPr>
         <p:spPr>
           <a:xfrm>
-            <a:off x="2651760" y="2341880"/>
+            <a:off x="2796235" y="2968600"/>
             <a:ext cx="914400" cy="264160"/>
           </a:xfrm>
           <a:prstGeom prst="rect">
@@ -7980,7 +7980,7 @@
         </p:nvSpPr>
         <p:spPr>
           <a:xfrm>
-            <a:off x="3447288" y="2012696"/>
+            <a:off x="3627882" y="2639416"/>
             <a:ext cx="0" cy="292608"/>
           </a:xfrm>
           <a:prstGeom prst="line">
@@ -8003,7 +8003,7 @@
         </p:nvSpPr>
         <p:spPr>
           <a:xfrm>
-            <a:off x="2990088" y="2341880"/>
+            <a:off x="3170682" y="2968600"/>
             <a:ext cx="914400" cy="264160"/>
           </a:xfrm>
           <a:prstGeom prst="rect">
@@ -8042,7 +8042,7 @@
         </p:nvSpPr>
         <p:spPr>
           <a:xfrm>
-            <a:off x="3785616" y="2012696"/>
+            <a:off x="4002329" y="2639416"/>
             <a:ext cx="0" cy="292608"/>
           </a:xfrm>
           <a:prstGeom prst="line">
@@ -8065,7 +8065,7 @@
         </p:nvSpPr>
         <p:spPr>
           <a:xfrm>
-            <a:off x="3328416" y="2341880"/>
+            <a:off x="3545129" y="2968600"/>
             <a:ext cx="914400" cy="264160"/>
           </a:xfrm>
           <a:prstGeom prst="rect">
@@ -8104,7 +8104,7 @@
         </p:nvSpPr>
         <p:spPr>
           <a:xfrm>
-            <a:off x="4123944" y="2012696"/>
+            <a:off x="4376776" y="2639416"/>
             <a:ext cx="0" cy="292608"/>
           </a:xfrm>
           <a:prstGeom prst="line">
@@ -8127,7 +8127,7 @@
         </p:nvSpPr>
         <p:spPr>
           <a:xfrm>
-            <a:off x="3666744" y="2341880"/>
+            <a:off x="3919576" y="2968600"/>
             <a:ext cx="914400" cy="264160"/>
           </a:xfrm>
           <a:prstGeom prst="rect">
@@ -8166,7 +8166,7 @@
         </p:nvSpPr>
         <p:spPr>
           <a:xfrm>
-            <a:off x="4462272" y="2012696"/>
+            <a:off x="4751222" y="2639416"/>
             <a:ext cx="0" cy="292608"/>
           </a:xfrm>
           <a:prstGeom prst="line">
@@ -8189,7 +8189,7 @@
         </p:nvSpPr>
         <p:spPr>
           <a:xfrm>
-            <a:off x="4005072" y="2341880"/>
+            <a:off x="4294022" y="2968600"/>
             <a:ext cx="914400" cy="264160"/>
           </a:xfrm>
           <a:prstGeom prst="rect">
@@ -8228,7 +8228,7 @@
         </p:nvSpPr>
         <p:spPr>
           <a:xfrm>
-            <a:off x="4800600" y="2012696"/>
+            <a:off x="5125669" y="2639416"/>
             <a:ext cx="0" cy="292608"/>
           </a:xfrm>
           <a:prstGeom prst="line">
@@ -8251,7 +8251,7 @@
         </p:nvSpPr>
         <p:spPr>
           <a:xfrm>
-            <a:off x="4343400" y="2341880"/>
+            <a:off x="4668469" y="2968600"/>
             <a:ext cx="914400" cy="264160"/>
           </a:xfrm>
           <a:prstGeom prst="rect">
@@ -8290,7 +8290,7 @@
         </p:nvSpPr>
         <p:spPr>
           <a:xfrm>
-            <a:off x="5138928" y="2012696"/>
+            <a:off x="5500116" y="2639416"/>
             <a:ext cx="0" cy="292608"/>
           </a:xfrm>
           <a:prstGeom prst="line">
@@ -8313,7 +8313,7 @@
         </p:nvSpPr>
         <p:spPr>
           <a:xfrm>
-            <a:off x="4681728" y="2341880"/>
+            <a:off x="5042916" y="2968600"/>
             <a:ext cx="914400" cy="264160"/>
           </a:xfrm>
           <a:prstGeom prst="rect">
@@ -8352,7 +8352,7 @@
         </p:nvSpPr>
         <p:spPr>
           <a:xfrm>
-            <a:off x="2340864" y="2067560"/>
+            <a:off x="2413102" y="2694280"/>
             <a:ext cx="182880" cy="182880"/>
           </a:xfrm>
           <a:prstGeom prst="ellipse">
@@ -8377,7 +8377,7 @@
         </p:nvSpPr>
         <p:spPr>
           <a:xfrm>
-            <a:off x="4370832" y="2067560"/>
+            <a:off x="4659782" y="2694280"/>
             <a:ext cx="182880" cy="182880"/>
           </a:xfrm>
           <a:prstGeom prst="ellipse">
@@ -8402,7 +8402,7 @@
         </p:nvSpPr>
         <p:spPr>
           <a:xfrm flipV="1">
-            <a:off x="2432304" y="1774952"/>
+            <a:off x="2504542" y="2401672"/>
             <a:ext cx="0" cy="338328"/>
           </a:xfrm>
           <a:prstGeom prst="line">
@@ -8425,8 +8425,8 @@
         </p:nvSpPr>
         <p:spPr>
           <a:xfrm>
-            <a:off x="2432304" y="1774952"/>
-            <a:ext cx="2029968" cy="0"/>
+            <a:off x="2504542" y="2401672"/>
+            <a:ext cx="2246681" cy="0"/>
           </a:xfrm>
           <a:prstGeom prst="line">
             <a:avLst/>
@@ -8449,8 +8449,8 @@
         </p:nvSpPr>
         <p:spPr>
           <a:xfrm>
-            <a:off x="2432304" y="1492504"/>
-            <a:ext cx="2029968" cy="264160"/>
+            <a:off x="2504542" y="2119224"/>
+            <a:ext cx="2246681" cy="264160"/>
           </a:xfrm>
           <a:prstGeom prst="rect">
             <a:avLst/>
@@ -8488,8 +8488,8 @@
         </p:nvSpPr>
         <p:spPr>
           <a:xfrm>
-            <a:off x="1481328" y="1976120"/>
-            <a:ext cx="3931920" cy="365760"/>
+            <a:off x="1481328" y="2602840"/>
+            <a:ext cx="4293108" cy="365760"/>
           </a:xfrm>
           <a:prstGeom prst="rect">
             <a:avLst/>

--- a/dist/초2/수학/도형과측정/초2_수학_도형과측정_04_m와cm_학생용.pptx
+++ b/dist/초2/수학/도형과측정/초2_수학_도형과측정_04_m와cm_학생용.pptx
@@ -121,13 +121,13 @@
   <p:extLst>
     <p:ext uri="{521415D9-36F7-43E2-AB2F-B90AF26B5E84}">
       <p14:sectionLst xmlns:p14="http://schemas.microsoft.com/office/powerpoint/2010/main">
-        <p14:section name="도입" id="{71aa1bdf-9108-00bc-15ab-8a17e2da98d8}">
+        <p14:section name="도입" id="{d09c713b-1989-a02e-693d-199098349cd8}">
           <p14:sldIdLst>
             <p14:sldId id="256"/>
             <p14:sldId id="257"/>
           </p14:sldIdLst>
         </p14:section>
-        <p14:section name="개념" id="{e2ee7ad4-07af-21b7-d859-9096114a8398}">
+        <p14:section name="개념" id="{2046fdd3-7ba9-bdc6-5263-eae6d9689333}">
           <p14:sldIdLst>
             <p14:sldId id="258"/>
             <p14:sldId id="259"/>
@@ -136,7 +136,7 @@
             <p14:sldId id="264"/>
           </p14:sldIdLst>
         </p14:section>
-        <p14:section name="연습" id="{84653748-442c-0f97-cb95-7e99f36c7498}">
+        <p14:section name="연습" id="{9d9168fb-f235-81cc-0335-5e1065801ebd}">
           <p14:sldIdLst>
             <p14:sldId id="261"/>
             <p14:sldId id="262"/>
@@ -144,24 +144,24 @@
             <p14:sldId id="266"/>
           </p14:sldIdLst>
         </p14:section>
-        <p14:section name="개념" id="{78e3e58c-7bbf-97b4-9065-2b0493ba21c2}">
+        <p14:section name="개념" id="{119309b4-7e69-ca65-371d-d6093750bbae}">
           <p14:sldIdLst/>
         </p14:section>
-        <p14:section name="연습" id="{e57f8569-d619-00ee-f07b-0dcb25f40320}">
+        <p14:section name="연습" id="{c32d3a64-265f-e8aa-6ada-71295ea4326a}">
           <p14:sldIdLst/>
         </p14:section>
-        <p14:section name="확인" id="{02233047-29d4-421d-c788-d46fe6fb2cb9}">
+        <p14:section name="확인" id="{7e3af535-2e7d-3871-b672-59e258644a36}">
           <p14:sldIdLst>
             <p14:sldId id="267"/>
             <p14:sldId id="268"/>
           </p14:sldIdLst>
         </p14:section>
-        <p14:section name="정리" id="{fce1932d-81e0-b658-c35b-b4d6c7c52457}">
+        <p14:section name="정리" id="{10dbbd3c-40eb-da7e-fee8-6fb149e4f233}">
           <p14:sldIdLst>
             <p14:sldId id="269"/>
           </p14:sldIdLst>
         </p14:section>
-        <p14:section name="보충" id="{90ecb037-e52c-110d-f3d2-cdd7f2dd83a2}">
+        <p14:section name="보충" id="{2dbecbce-a907-a8a1-d8c7-86ff20a3c08a}">
           <p14:sldIdLst>
             <p14:sldId id="270"/>
           </p14:sldIdLst>
@@ -3418,7 +3418,7 @@
               <a:buNone/>
             </a:pPr>
             <a:r>
-              <a:rPr lang="ko-KR" altLang="en-US" sz="1600" b="1" dirty="0">
+              <a:rPr lang="en-US" altLang="ko-KR" sz="1600" b="1" dirty="0">
                 <a:solidFill>
                   <a:srgbClr val="3D5A80"/>
                 </a:solidFill>
@@ -3777,7 +3777,7 @@
               <a:buNone/>
             </a:pPr>
             <a:r>
-              <a:rPr lang="ko-KR" altLang="en-US" sz="3600" b="1" dirty="0">
+              <a:rPr lang="en-US" altLang="ko-KR" sz="3600" b="1" dirty="0">
                 <a:solidFill>
                   <a:srgbClr val="1F2937"/>
                 </a:solidFill>
@@ -3863,7 +3863,7 @@
               <a:buNone/>
             </a:pPr>
             <a:r>
-              <a:rPr lang="ko-KR" altLang="en-US" sz="3600" b="1" dirty="0">
+              <a:rPr lang="en-US" altLang="ko-KR" sz="3600" b="1" dirty="0">
                 <a:solidFill>
                   <a:srgbClr val="1F2937"/>
                 </a:solidFill>
@@ -3949,7 +3949,7 @@
               <a:buNone/>
             </a:pPr>
             <a:r>
-              <a:rPr lang="ko-KR" altLang="en-US" sz="3600" b="1" dirty="0">
+              <a:rPr lang="en-US" altLang="ko-KR" sz="3600" b="1" dirty="0">
                 <a:solidFill>
                   <a:srgbClr val="1F2937"/>
                 </a:solidFill>
@@ -4573,7 +4573,7 @@
               <a:buNone/>
             </a:pPr>
             <a:r>
-              <a:rPr lang="ko-KR" altLang="en-US" sz="3600" b="1" dirty="0">
+              <a:rPr lang="en-US" altLang="ko-KR" sz="3600" b="1" dirty="0">
                 <a:solidFill>
                   <a:srgbClr val="1F2937"/>
                 </a:solidFill>
@@ -5044,7 +5044,7 @@
               <a:buNone/>
             </a:pPr>
             <a:r>
-              <a:rPr lang="ko-KR" altLang="en-US" sz="3200" dirty="0">
+              <a:rPr lang="en-US" altLang="ko-KR" sz="3200" dirty="0">
                 <a:solidFill>
                   <a:srgbClr val="1F2937"/>
                 </a:solidFill>
@@ -5160,7 +5160,7 @@
               <a:buNone/>
             </a:pPr>
             <a:r>
-              <a:rPr lang="ko-KR" altLang="en-US" sz="3200" dirty="0">
+              <a:rPr lang="en-US" altLang="ko-KR" sz="3200" dirty="0">
                 <a:solidFill>
                   <a:srgbClr val="1F2937"/>
                 </a:solidFill>
@@ -5276,7 +5276,7 @@
               <a:buNone/>
             </a:pPr>
             <a:r>
-              <a:rPr lang="ko-KR" altLang="en-US" sz="3200" dirty="0">
+              <a:rPr lang="en-US" altLang="ko-KR" sz="3200" dirty="0">
                 <a:solidFill>
                   <a:srgbClr val="1F2937"/>
                 </a:solidFill>
@@ -5392,7 +5392,7 @@
               <a:buNone/>
             </a:pPr>
             <a:r>
-              <a:rPr lang="ko-KR" altLang="en-US" sz="3200" dirty="0">
+              <a:rPr lang="en-US" altLang="ko-KR" sz="3200" dirty="0">
                 <a:solidFill>
                   <a:srgbClr val="1F2937"/>
                 </a:solidFill>
@@ -5803,7 +5803,7 @@
               <a:buNone/>
             </a:pPr>
             <a:r>
-              <a:rPr lang="ko-KR" altLang="en-US" sz="2600" dirty="0">
+              <a:rPr lang="en-US" altLang="ko-KR" sz="2600" dirty="0">
                 <a:solidFill>
                   <a:srgbClr val="FFFFFF"/>
                 </a:solidFill>
@@ -5820,7 +5820,7 @@
               <a:buNone/>
             </a:pPr>
             <a:r>
-              <a:rPr lang="ko-KR" altLang="en-US" sz="2600" dirty="0">
+              <a:rPr lang="en-US" altLang="ko-KR" sz="2600" dirty="0">
                 <a:solidFill>
                   <a:srgbClr val="FFFFFF"/>
                 </a:solidFill>
@@ -5859,7 +5859,7 @@
               <a:buNone/>
             </a:pPr>
             <a:r>
-              <a:rPr lang="ko-KR" altLang="en-US" sz="2600" dirty="0">
+              <a:rPr lang="en-US" altLang="ko-KR" sz="2600" dirty="0">
                 <a:solidFill>
                   <a:srgbClr val="FFFFFF"/>
                 </a:solidFill>
@@ -5876,7 +5876,7 @@
               <a:buNone/>
             </a:pPr>
             <a:r>
-              <a:rPr lang="ko-KR" altLang="en-US" sz="2600" dirty="0">
+              <a:rPr lang="en-US" altLang="ko-KR" sz="2600" dirty="0">
                 <a:solidFill>
                   <a:srgbClr val="FFFFFF"/>
                 </a:solidFill>
@@ -9887,7 +9887,7 @@
               <a:buNone/>
             </a:pPr>
             <a:r>
-              <a:rPr lang="ko-KR" altLang="en-US" sz="2600" b="1" dirty="0">
+              <a:rPr lang="en-US" altLang="ko-KR" sz="2600" b="1" dirty="0">
                 <a:solidFill>
                   <a:srgbClr val="3D5A80"/>
                 </a:solidFill>
@@ -10138,7 +10138,7 @@
               <a:buNone/>
             </a:pPr>
             <a:r>
-              <a:rPr lang="ko-KR" altLang="en-US" sz="3200" b="1" dirty="0">
+              <a:rPr lang="en-US" altLang="ko-KR" sz="3200" b="1" dirty="0">
                 <a:solidFill>
                   <a:srgbClr val="1F2937"/>
                 </a:solidFill>
@@ -10919,7 +10919,7 @@
               <a:buNone/>
             </a:pPr>
             <a:r>
-              <a:rPr lang="ko-KR" altLang="en-US" sz="2400" b="1" dirty="0">
+              <a:rPr lang="en-US" altLang="ko-KR" sz="2400" b="1" dirty="0">
                 <a:solidFill>
                   <a:srgbClr val="3D5A80"/>
                 </a:solidFill>
@@ -11005,7 +11005,7 @@
               <a:buNone/>
             </a:pPr>
             <a:r>
-              <a:rPr lang="ko-KR" altLang="en-US" sz="2400" b="1" dirty="0">
+              <a:rPr lang="en-US" altLang="ko-KR" sz="2400" b="1" dirty="0">
                 <a:solidFill>
                   <a:srgbClr val="3D5A80"/>
                 </a:solidFill>
@@ -11187,7 +11187,7 @@
               <a:buNone/>
             </a:pPr>
             <a:r>
-              <a:rPr lang="ko-KR" altLang="en-US" sz="3600" b="1" dirty="0">
+              <a:rPr lang="en-US" altLang="ko-KR" sz="3600" b="1" dirty="0">
                 <a:solidFill>
                   <a:srgbClr val="1F2937"/>
                 </a:solidFill>
@@ -12217,7 +12217,7 @@
               <a:buNone/>
             </a:pPr>
             <a:r>
-              <a:rPr lang="ko-KR" altLang="en-US" sz="1600" b="1" dirty="0">
+              <a:rPr lang="en-US" altLang="ko-KR" sz="1600" b="1" dirty="0">
                 <a:solidFill>
                   <a:srgbClr val="3D5A80"/>
                 </a:solidFill>
@@ -12303,7 +12303,7 @@
               <a:buNone/>
             </a:pPr>
             <a:r>
-              <a:rPr lang="ko-KR" altLang="en-US" sz="1600" b="1" dirty="0">
+              <a:rPr lang="en-US" altLang="ko-KR" sz="1600" b="1" dirty="0">
                 <a:solidFill>
                   <a:srgbClr val="3D5A80"/>
                 </a:solidFill>
@@ -12670,7 +12670,7 @@
               <a:buNone/>
             </a:pPr>
             <a:r>
-              <a:rPr lang="ko-KR" altLang="en-US" sz="3200" dirty="0">
+              <a:rPr lang="en-US" altLang="ko-KR" sz="3200" dirty="0">
                 <a:solidFill>
                   <a:srgbClr val="1F2937"/>
                 </a:solidFill>
@@ -12939,7 +12939,7 @@
               <a:buNone/>
             </a:pPr>
             <a:r>
-              <a:rPr lang="ko-KR" altLang="en-US" sz="3600" b="1" dirty="0">
+              <a:rPr lang="en-US" altLang="ko-KR" sz="3600" b="1" dirty="0">
                 <a:solidFill>
                   <a:srgbClr val="1F2937"/>
                 </a:solidFill>
@@ -13025,7 +13025,7 @@
               <a:buNone/>
             </a:pPr>
             <a:r>
-              <a:rPr lang="ko-KR" altLang="en-US" sz="3600" b="1" dirty="0">
+              <a:rPr lang="en-US" altLang="ko-KR" sz="3600" b="1" dirty="0">
                 <a:solidFill>
                   <a:srgbClr val="1F2937"/>
                 </a:solidFill>
@@ -13111,7 +13111,7 @@
               <a:buNone/>
             </a:pPr>
             <a:r>
-              <a:rPr lang="ko-KR" altLang="en-US" sz="3600" b="1" dirty="0">
+              <a:rPr lang="en-US" altLang="ko-KR" sz="3600" b="1" dirty="0">
                 <a:solidFill>
                   <a:srgbClr val="1F2937"/>
                 </a:solidFill>
@@ -13197,7 +13197,7 @@
               <a:buNone/>
             </a:pPr>
             <a:r>
-              <a:rPr lang="ko-KR" altLang="en-US" sz="3600" b="1" dirty="0">
+              <a:rPr lang="en-US" altLang="ko-KR" sz="3600" b="1" dirty="0">
                 <a:solidFill>
                   <a:srgbClr val="1F2937"/>
                 </a:solidFill>
@@ -13774,7 +13774,7 @@
               <a:buNone/>
             </a:pPr>
             <a:r>
-              <a:rPr lang="ko-KR" altLang="en-US" sz="3600" b="1" dirty="0">
+              <a:rPr lang="en-US" altLang="ko-KR" sz="3600" b="1" dirty="0">
                 <a:solidFill>
                   <a:srgbClr val="1F2937"/>
                 </a:solidFill>
@@ -13803,7 +13803,7 @@
           </p:nvPr>
         </p:nvGraphicFramePr>
         <p:xfrm>
-          <a:off x="7789408" y="3355340"/>
+          <a:off x="7789408" y="3388360"/>
           <a:ext cx="3840480" cy="914400"/>
         </p:xfrm>
         <a:graphic>
@@ -13815,7 +13815,7 @@
                 <a:gridCol w="1536192"/>
                 <a:gridCol w="1536192"/>
               </a:tblGrid>
-              <a:tr h="528320">
+              <a:tr h="511810">
                 <a:tc>
                   <a:txBody>
                     <a:bodyPr/>
@@ -14010,7 +14010,7 @@
                   </a:tcPr>
                 </a:tc>
               </a:tr>
-              <a:tr h="528320">
+              <a:tr h="511810">
                 <a:tc>
                   <a:txBody>
                     <a:bodyPr/>
@@ -14205,7 +14205,7 @@
                   </a:tcPr>
                 </a:tc>
               </a:tr>
-              <a:tr h="528320">
+              <a:tr h="511810">
                 <a:tc>
                   <a:txBody>
                     <a:bodyPr/>
@@ -14411,7 +14411,7 @@
                   </a:tcPr>
                 </a:tc>
               </a:tr>
-              <a:tr h="528320">
+              <a:tr h="511810">
                 <a:tc>
                   <a:txBody>
                     <a:bodyPr/>
@@ -15001,7 +15001,7 @@
               <a:buNone/>
             </a:pPr>
             <a:r>
-              <a:rPr lang="ko-KR" altLang="en-US" sz="3600" b="1" dirty="0">
+              <a:rPr lang="en-US" altLang="ko-KR" sz="3600" b="1" dirty="0">
                 <a:solidFill>
                   <a:srgbClr val="1F2937"/>
                 </a:solidFill>
@@ -15030,7 +15030,7 @@
           </p:nvPr>
         </p:nvGraphicFramePr>
         <p:xfrm>
-          <a:off x="7789408" y="3355340"/>
+          <a:off x="7789408" y="3388360"/>
           <a:ext cx="3840480" cy="914400"/>
         </p:xfrm>
         <a:graphic>
@@ -15042,7 +15042,7 @@
                 <a:gridCol w="1536192"/>
                 <a:gridCol w="1536192"/>
               </a:tblGrid>
-              <a:tr h="528320">
+              <a:tr h="511810">
                 <a:tc>
                   <a:txBody>
                     <a:bodyPr/>
@@ -15237,7 +15237,7 @@
                   </a:tcPr>
                 </a:tc>
               </a:tr>
-              <a:tr h="528320">
+              <a:tr h="511810">
                 <a:tc>
                   <a:txBody>
                     <a:bodyPr/>
@@ -15432,7 +15432,7 @@
                   </a:tcPr>
                 </a:tc>
               </a:tr>
-              <a:tr h="528320">
+              <a:tr h="511810">
                 <a:tc>
                   <a:txBody>
                     <a:bodyPr/>
@@ -15638,7 +15638,7 @@
                   </a:tcPr>
                 </a:tc>
               </a:tr>
-              <a:tr h="528320">
+              <a:tr h="511810">
                 <a:tc>
                   <a:txBody>
                     <a:bodyPr/>
